--- a/lectures/week-06/lecture-zh.pptx
+++ b/lectures/week-06/lecture-zh.pptx
@@ -16636,7 +16636,7 @@
                 </a:solidFill>
                 <a:latin typeface="Source Han Sans SC"/>
               </a:rPr>
-              <a:t>理论约 90 min · Lab 约 75 min · 小测与小结 15 min</a:t>
+              <a:t>理论约 90 min · Lab 80 min · 小测与小结 10 min</a:t>
             </a:r>
           </a:p>
         </p:txBody>

--- a/lectures/week-06/lecture-zh.pptx
+++ b/lectures/week-06/lecture-zh.pptx
@@ -6336,7 +6336,7 @@
         <p:spPr>
           <a:xfrm>
             <a:off x="1987199" y="1584000"/>
-            <a:ext cx="1173600" cy="475200"/>
+            <a:ext cx="1000079" cy="475200"/>
           </a:xfrm>
           <a:prstGeom prst="rect">
             <a:avLst/>
@@ -6380,7 +6380,7 @@
         <p:spPr>
           <a:xfrm>
             <a:off x="1987199" y="1713600"/>
-            <a:ext cx="1173600" cy="216000"/>
+            <a:ext cx="1000079" cy="216000"/>
           </a:xfrm>
           <a:prstGeom prst="rect">
             <a:avLst/>
@@ -6418,8 +6418,8 @@
         </p:nvSpPr>
         <p:spPr>
           <a:xfrm>
-            <a:off x="3211200" y="1584000"/>
-            <a:ext cx="1173600" cy="475200"/>
+            <a:off x="3037679" y="1584000"/>
+            <a:ext cx="1000079" cy="475200"/>
           </a:xfrm>
           <a:prstGeom prst="rect">
             <a:avLst/>
@@ -6462,8 +6462,8 @@
         </p:nvSpPr>
         <p:spPr>
           <a:xfrm>
-            <a:off x="3211200" y="1713600"/>
-            <a:ext cx="1173600" cy="216000"/>
+            <a:off x="3037679" y="1713600"/>
+            <a:ext cx="1000079" cy="216000"/>
           </a:xfrm>
           <a:prstGeom prst="rect">
             <a:avLst/>
@@ -6501,8 +6501,8 @@
         </p:nvSpPr>
         <p:spPr>
           <a:xfrm>
-            <a:off x="4435200" y="1584000"/>
-            <a:ext cx="1173600" cy="475200"/>
+            <a:off x="4088159" y="1584000"/>
+            <a:ext cx="1000079" cy="475200"/>
           </a:xfrm>
           <a:prstGeom prst="rect">
             <a:avLst/>
@@ -6545,8 +6545,8 @@
         </p:nvSpPr>
         <p:spPr>
           <a:xfrm>
-            <a:off x="4435200" y="1713600"/>
-            <a:ext cx="1173600" cy="216000"/>
+            <a:off x="4088159" y="1713600"/>
+            <a:ext cx="1000079" cy="216000"/>
           </a:xfrm>
           <a:prstGeom prst="rect">
             <a:avLst/>
@@ -6584,8 +6584,8 @@
         </p:nvSpPr>
         <p:spPr>
           <a:xfrm>
-            <a:off x="5659200" y="1584000"/>
-            <a:ext cx="1173600" cy="475200"/>
+            <a:off x="5138640" y="1584000"/>
+            <a:ext cx="1000079" cy="475200"/>
           </a:xfrm>
           <a:prstGeom prst="rect">
             <a:avLst/>
@@ -6628,8 +6628,8 @@
         </p:nvSpPr>
         <p:spPr>
           <a:xfrm>
-            <a:off x="5659200" y="1713600"/>
-            <a:ext cx="1173600" cy="216000"/>
+            <a:off x="5138640" y="1713600"/>
+            <a:ext cx="1000079" cy="216000"/>
           </a:xfrm>
           <a:prstGeom prst="rect">
             <a:avLst/>
@@ -6667,8 +6667,8 @@
         </p:nvSpPr>
         <p:spPr>
           <a:xfrm>
-            <a:off x="6883199" y="1584000"/>
-            <a:ext cx="1173600" cy="475200"/>
+            <a:off x="6189120" y="1584000"/>
+            <a:ext cx="1000079" cy="475200"/>
           </a:xfrm>
           <a:prstGeom prst="rect">
             <a:avLst/>
@@ -6711,8 +6711,8 @@
         </p:nvSpPr>
         <p:spPr>
           <a:xfrm>
-            <a:off x="6883199" y="1713600"/>
-            <a:ext cx="1173600" cy="216000"/>
+            <a:off x="6189120" y="1713600"/>
+            <a:ext cx="1000079" cy="216000"/>
           </a:xfrm>
           <a:prstGeom prst="rect">
             <a:avLst/>
@@ -6790,7 +6790,7 @@
         <p:spPr>
           <a:xfrm>
             <a:off x="1987199" y="2210400"/>
-            <a:ext cx="1173600" cy="475200"/>
+            <a:ext cx="1000079" cy="475200"/>
           </a:xfrm>
           <a:prstGeom prst="rect">
             <a:avLst/>
@@ -6834,7 +6834,7 @@
         <p:spPr>
           <a:xfrm>
             <a:off x="1987199" y="2340000"/>
-            <a:ext cx="1173600" cy="216000"/>
+            <a:ext cx="1000079" cy="216000"/>
           </a:xfrm>
           <a:prstGeom prst="rect">
             <a:avLst/>
@@ -6872,8 +6872,8 @@
         </p:nvSpPr>
         <p:spPr>
           <a:xfrm>
-            <a:off x="3211200" y="2210400"/>
-            <a:ext cx="1173600" cy="475200"/>
+            <a:off x="3037679" y="2210400"/>
+            <a:ext cx="1000079" cy="475200"/>
           </a:xfrm>
           <a:prstGeom prst="rect">
             <a:avLst/>
@@ -6916,8 +6916,8 @@
         </p:nvSpPr>
         <p:spPr>
           <a:xfrm>
-            <a:off x="3211200" y="2340000"/>
-            <a:ext cx="1173600" cy="216000"/>
+            <a:off x="3037679" y="2340000"/>
+            <a:ext cx="1000079" cy="216000"/>
           </a:xfrm>
           <a:prstGeom prst="rect">
             <a:avLst/>
@@ -6955,8 +6955,8 @@
         </p:nvSpPr>
         <p:spPr>
           <a:xfrm>
-            <a:off x="4435200" y="2210400"/>
-            <a:ext cx="1173600" cy="475200"/>
+            <a:off x="4088159" y="2210400"/>
+            <a:ext cx="1000079" cy="475200"/>
           </a:xfrm>
           <a:prstGeom prst="rect">
             <a:avLst/>
@@ -6999,8 +6999,8 @@
         </p:nvSpPr>
         <p:spPr>
           <a:xfrm>
-            <a:off x="4435200" y="2340000"/>
-            <a:ext cx="1173600" cy="216000"/>
+            <a:off x="4088159" y="2340000"/>
+            <a:ext cx="1000079" cy="216000"/>
           </a:xfrm>
           <a:prstGeom prst="rect">
             <a:avLst/>
@@ -7038,8 +7038,8 @@
         </p:nvSpPr>
         <p:spPr>
           <a:xfrm>
-            <a:off x="5659200" y="2210400"/>
-            <a:ext cx="1173600" cy="475200"/>
+            <a:off x="5138640" y="2210400"/>
+            <a:ext cx="1000079" cy="475200"/>
           </a:xfrm>
           <a:prstGeom prst="rect">
             <a:avLst/>
@@ -7082,8 +7082,8 @@
         </p:nvSpPr>
         <p:spPr>
           <a:xfrm>
-            <a:off x="5659200" y="2340000"/>
-            <a:ext cx="1173600" cy="216000"/>
+            <a:off x="5138640" y="2340000"/>
+            <a:ext cx="1000079" cy="216000"/>
           </a:xfrm>
           <a:prstGeom prst="rect">
             <a:avLst/>
@@ -7121,8 +7121,8 @@
         </p:nvSpPr>
         <p:spPr>
           <a:xfrm>
-            <a:off x="6883199" y="2210400"/>
-            <a:ext cx="1173600" cy="475200"/>
+            <a:off x="6189120" y="2210400"/>
+            <a:ext cx="1000079" cy="475200"/>
           </a:xfrm>
           <a:prstGeom prst="rect">
             <a:avLst/>
@@ -7165,8 +7165,8 @@
         </p:nvSpPr>
         <p:spPr>
           <a:xfrm>
-            <a:off x="6883199" y="2340000"/>
-            <a:ext cx="1173600" cy="216000"/>
+            <a:off x="6189120" y="2340000"/>
+            <a:ext cx="1000079" cy="216000"/>
           </a:xfrm>
           <a:prstGeom prst="rect">
             <a:avLst/>
@@ -7244,7 +7244,7 @@
         <p:spPr>
           <a:xfrm>
             <a:off x="1987199" y="2836800"/>
-            <a:ext cx="1173600" cy="475200"/>
+            <a:ext cx="1000079" cy="475200"/>
           </a:xfrm>
           <a:prstGeom prst="rect">
             <a:avLst/>
@@ -7288,7 +7288,7 @@
         <p:spPr>
           <a:xfrm>
             <a:off x="1987199" y="2966400"/>
-            <a:ext cx="1173600" cy="216000"/>
+            <a:ext cx="1000079" cy="216000"/>
           </a:xfrm>
           <a:prstGeom prst="rect">
             <a:avLst/>
@@ -7326,8 +7326,8 @@
         </p:nvSpPr>
         <p:spPr>
           <a:xfrm>
-            <a:off x="3211200" y="2836800"/>
-            <a:ext cx="1173600" cy="475200"/>
+            <a:off x="3037679" y="2836800"/>
+            <a:ext cx="1000079" cy="475200"/>
           </a:xfrm>
           <a:prstGeom prst="rect">
             <a:avLst/>
@@ -7370,8 +7370,8 @@
         </p:nvSpPr>
         <p:spPr>
           <a:xfrm>
-            <a:off x="3211200" y="2966400"/>
-            <a:ext cx="1173600" cy="216000"/>
+            <a:off x="3037679" y="2966400"/>
+            <a:ext cx="1000079" cy="216000"/>
           </a:xfrm>
           <a:prstGeom prst="rect">
             <a:avLst/>
@@ -7409,8 +7409,8 @@
         </p:nvSpPr>
         <p:spPr>
           <a:xfrm>
-            <a:off x="4435200" y="2836800"/>
-            <a:ext cx="1173600" cy="475200"/>
+            <a:off x="4088159" y="2836800"/>
+            <a:ext cx="1000079" cy="475200"/>
           </a:xfrm>
           <a:prstGeom prst="rect">
             <a:avLst/>
@@ -7453,8 +7453,8 @@
         </p:nvSpPr>
         <p:spPr>
           <a:xfrm>
-            <a:off x="4435200" y="2966400"/>
-            <a:ext cx="1173600" cy="216000"/>
+            <a:off x="4088159" y="2966400"/>
+            <a:ext cx="1000079" cy="216000"/>
           </a:xfrm>
           <a:prstGeom prst="rect">
             <a:avLst/>
@@ -7492,8 +7492,8 @@
         </p:nvSpPr>
         <p:spPr>
           <a:xfrm>
-            <a:off x="5659200" y="2836800"/>
-            <a:ext cx="1173600" cy="475200"/>
+            <a:off x="5138640" y="2836800"/>
+            <a:ext cx="1000079" cy="475200"/>
           </a:xfrm>
           <a:prstGeom prst="rect">
             <a:avLst/>
@@ -7536,8 +7536,8 @@
         </p:nvSpPr>
         <p:spPr>
           <a:xfrm>
-            <a:off x="5659200" y="2966400"/>
-            <a:ext cx="1173600" cy="216000"/>
+            <a:off x="5138640" y="2966400"/>
+            <a:ext cx="1000079" cy="216000"/>
           </a:xfrm>
           <a:prstGeom prst="rect">
             <a:avLst/>
@@ -7575,8 +7575,8 @@
         </p:nvSpPr>
         <p:spPr>
           <a:xfrm>
-            <a:off x="6883199" y="2836800"/>
-            <a:ext cx="1173600" cy="475200"/>
+            <a:off x="6189120" y="2836800"/>
+            <a:ext cx="1000079" cy="475200"/>
           </a:xfrm>
           <a:prstGeom prst="rect">
             <a:avLst/>
@@ -7619,8 +7619,8 @@
         </p:nvSpPr>
         <p:spPr>
           <a:xfrm>
-            <a:off x="6883199" y="2966400"/>
-            <a:ext cx="1173600" cy="216000"/>
+            <a:off x="6189120" y="2966400"/>
+            <a:ext cx="1000079" cy="216000"/>
           </a:xfrm>
           <a:prstGeom prst="rect">
             <a:avLst/>
@@ -7698,7 +7698,7 @@
         <p:spPr>
           <a:xfrm>
             <a:off x="1987199" y="3463200"/>
-            <a:ext cx="1173600" cy="475200"/>
+            <a:ext cx="1000079" cy="475200"/>
           </a:xfrm>
           <a:prstGeom prst="rect">
             <a:avLst/>
@@ -7742,7 +7742,7 @@
         <p:spPr>
           <a:xfrm>
             <a:off x="1987199" y="3592800"/>
-            <a:ext cx="1173600" cy="216000"/>
+            <a:ext cx="1000079" cy="216000"/>
           </a:xfrm>
           <a:prstGeom prst="rect">
             <a:avLst/>
@@ -7780,8 +7780,8 @@
         </p:nvSpPr>
         <p:spPr>
           <a:xfrm>
-            <a:off x="3211200" y="3463200"/>
-            <a:ext cx="1173600" cy="475200"/>
+            <a:off x="3037679" y="3463200"/>
+            <a:ext cx="1000079" cy="475200"/>
           </a:xfrm>
           <a:prstGeom prst="rect">
             <a:avLst/>
@@ -7824,8 +7824,8 @@
         </p:nvSpPr>
         <p:spPr>
           <a:xfrm>
-            <a:off x="3211200" y="3592800"/>
-            <a:ext cx="1173600" cy="216000"/>
+            <a:off x="3037679" y="3592800"/>
+            <a:ext cx="1000079" cy="216000"/>
           </a:xfrm>
           <a:prstGeom prst="rect">
             <a:avLst/>
@@ -7863,8 +7863,8 @@
         </p:nvSpPr>
         <p:spPr>
           <a:xfrm>
-            <a:off x="4435200" y="3463200"/>
-            <a:ext cx="1173600" cy="475200"/>
+            <a:off x="4088159" y="3463200"/>
+            <a:ext cx="1000079" cy="475200"/>
           </a:xfrm>
           <a:prstGeom prst="rect">
             <a:avLst/>
@@ -7907,8 +7907,8 @@
         </p:nvSpPr>
         <p:spPr>
           <a:xfrm>
-            <a:off x="4435200" y="3592800"/>
-            <a:ext cx="1173600" cy="216000"/>
+            <a:off x="4088159" y="3592800"/>
+            <a:ext cx="1000079" cy="216000"/>
           </a:xfrm>
           <a:prstGeom prst="rect">
             <a:avLst/>
@@ -7946,8 +7946,8 @@
         </p:nvSpPr>
         <p:spPr>
           <a:xfrm>
-            <a:off x="5659200" y="3463200"/>
-            <a:ext cx="1173600" cy="475200"/>
+            <a:off x="5138640" y="3463200"/>
+            <a:ext cx="1000079" cy="475200"/>
           </a:xfrm>
           <a:prstGeom prst="rect">
             <a:avLst/>
@@ -7990,8 +7990,8 @@
         </p:nvSpPr>
         <p:spPr>
           <a:xfrm>
-            <a:off x="5659200" y="3592800"/>
-            <a:ext cx="1173600" cy="216000"/>
+            <a:off x="5138640" y="3592800"/>
+            <a:ext cx="1000079" cy="216000"/>
           </a:xfrm>
           <a:prstGeom prst="rect">
             <a:avLst/>
@@ -8029,8 +8029,8 @@
         </p:nvSpPr>
         <p:spPr>
           <a:xfrm>
-            <a:off x="6883199" y="3463200"/>
-            <a:ext cx="1173600" cy="475200"/>
+            <a:off x="6189120" y="3463200"/>
+            <a:ext cx="1000079" cy="475200"/>
           </a:xfrm>
           <a:prstGeom prst="rect">
             <a:avLst/>
@@ -8073,8 +8073,8 @@
         </p:nvSpPr>
         <p:spPr>
           <a:xfrm>
-            <a:off x="6883199" y="3592800"/>
-            <a:ext cx="1173600" cy="216000"/>
+            <a:off x="6189120" y="3592800"/>
+            <a:ext cx="1000079" cy="216000"/>
           </a:xfrm>
           <a:prstGeom prst="rect">
             <a:avLst/>
@@ -8152,7 +8152,7 @@
         <p:spPr>
           <a:xfrm>
             <a:off x="1987199" y="4089600"/>
-            <a:ext cx="1173600" cy="475200"/>
+            <a:ext cx="1000079" cy="475200"/>
           </a:xfrm>
           <a:prstGeom prst="rect">
             <a:avLst/>
@@ -8196,7 +8196,7 @@
         <p:spPr>
           <a:xfrm>
             <a:off x="1987199" y="4219200"/>
-            <a:ext cx="1173600" cy="216000"/>
+            <a:ext cx="1000079" cy="216000"/>
           </a:xfrm>
           <a:prstGeom prst="rect">
             <a:avLst/>
@@ -8234,8 +8234,8 @@
         </p:nvSpPr>
         <p:spPr>
           <a:xfrm>
-            <a:off x="3211200" y="4089600"/>
-            <a:ext cx="1173600" cy="475200"/>
+            <a:off x="3037679" y="4089600"/>
+            <a:ext cx="1000079" cy="475200"/>
           </a:xfrm>
           <a:prstGeom prst="rect">
             <a:avLst/>
@@ -8278,8 +8278,8 @@
         </p:nvSpPr>
         <p:spPr>
           <a:xfrm>
-            <a:off x="3211200" y="4219200"/>
-            <a:ext cx="1173600" cy="216000"/>
+            <a:off x="3037679" y="4219200"/>
+            <a:ext cx="1000079" cy="216000"/>
           </a:xfrm>
           <a:prstGeom prst="rect">
             <a:avLst/>
@@ -8317,8 +8317,8 @@
         </p:nvSpPr>
         <p:spPr>
           <a:xfrm>
-            <a:off x="4435200" y="4089600"/>
-            <a:ext cx="1173600" cy="475200"/>
+            <a:off x="4088159" y="4089600"/>
+            <a:ext cx="1000079" cy="475200"/>
           </a:xfrm>
           <a:prstGeom prst="rect">
             <a:avLst/>
@@ -8361,8 +8361,8 @@
         </p:nvSpPr>
         <p:spPr>
           <a:xfrm>
-            <a:off x="4435200" y="4219200"/>
-            <a:ext cx="1173600" cy="216000"/>
+            <a:off x="4088159" y="4219200"/>
+            <a:ext cx="1000079" cy="216000"/>
           </a:xfrm>
           <a:prstGeom prst="rect">
             <a:avLst/>
@@ -8400,8 +8400,8 @@
         </p:nvSpPr>
         <p:spPr>
           <a:xfrm>
-            <a:off x="5659200" y="4089600"/>
-            <a:ext cx="1173600" cy="475200"/>
+            <a:off x="5138640" y="4089600"/>
+            <a:ext cx="1000079" cy="475200"/>
           </a:xfrm>
           <a:prstGeom prst="rect">
             <a:avLst/>
@@ -8444,8 +8444,8 @@
         </p:nvSpPr>
         <p:spPr>
           <a:xfrm>
-            <a:off x="5659200" y="4219200"/>
-            <a:ext cx="1173600" cy="216000"/>
+            <a:off x="5138640" y="4219200"/>
+            <a:ext cx="1000079" cy="216000"/>
           </a:xfrm>
           <a:prstGeom prst="rect">
             <a:avLst/>
@@ -8483,8 +8483,8 @@
         </p:nvSpPr>
         <p:spPr>
           <a:xfrm>
-            <a:off x="6883199" y="4089600"/>
-            <a:ext cx="1173600" cy="475200"/>
+            <a:off x="6189120" y="4089600"/>
+            <a:ext cx="1000079" cy="475200"/>
           </a:xfrm>
           <a:prstGeom prst="rect">
             <a:avLst/>
@@ -8527,8 +8527,8 @@
         </p:nvSpPr>
         <p:spPr>
           <a:xfrm>
-            <a:off x="6883199" y="4219200"/>
-            <a:ext cx="1173600" cy="216000"/>
+            <a:off x="6189120" y="4219200"/>
+            <a:ext cx="1000079" cy="216000"/>
           </a:xfrm>
           <a:prstGeom prst="rect">
             <a:avLst/>
@@ -8952,7 +8952,7 @@
         <p:spPr>
           <a:xfrm>
             <a:off x="2379600" y="1105200"/>
-            <a:ext cx="5040000" cy="503999"/>
+            <a:ext cx="5040000" cy="612000"/>
           </a:xfrm>
           <a:prstGeom prst="rect">
             <a:avLst/>
@@ -9030,7 +9030,7 @@
         <p:spPr>
           <a:xfrm>
             <a:off x="799200" y="2736000"/>
-            <a:ext cx="8640000" cy="1620000"/>
+            <a:ext cx="8640000" cy="829798"/>
           </a:xfrm>
           <a:prstGeom prst="rect">
             <a:avLst/>
@@ -10120,7 +10120,7 @@
         <p:spPr>
           <a:xfrm>
             <a:off x="1015200" y="1890000"/>
-            <a:ext cx="2895240" cy="3240000"/>
+            <a:ext cx="2895240" cy="3276000"/>
           </a:xfrm>
           <a:prstGeom prst="rect">
             <a:avLst/>
@@ -10348,7 +10348,7 @@
         <p:spPr>
           <a:xfrm>
             <a:off x="4648440" y="1890000"/>
-            <a:ext cx="2895240" cy="3240000"/>
+            <a:ext cx="2895240" cy="3276000"/>
           </a:xfrm>
           <a:prstGeom prst="rect">
             <a:avLst/>
@@ -10576,7 +10576,7 @@
         <p:spPr>
           <a:xfrm>
             <a:off x="8281679" y="1890000"/>
-            <a:ext cx="2895240" cy="3240000"/>
+            <a:ext cx="2895240" cy="3276000"/>
           </a:xfrm>
           <a:prstGeom prst="rect">
             <a:avLst/>
@@ -12072,7 +12072,7 @@
                     <a:lstStyle/>
                     <a:p>
                       <a:r>
-                        <a:rPr sz="1100">
+                        <a:rPr sz="1100" b="0">
                           <a:solidFill>
                             <a:srgbClr val="1F2937"/>
                           </a:solidFill>
@@ -12094,7 +12094,7 @@
                     <a:lstStyle/>
                     <a:p>
                       <a:r>
-                        <a:rPr sz="1100">
+                        <a:rPr sz="1100" b="0">
                           <a:solidFill>
                             <a:srgbClr val="1F2937"/>
                           </a:solidFill>
@@ -12116,7 +12116,7 @@
                     <a:lstStyle/>
                     <a:p>
                       <a:r>
-                        <a:rPr sz="1100">
+                        <a:rPr sz="1100" b="0">
                           <a:solidFill>
                             <a:srgbClr val="1F2937"/>
                           </a:solidFill>
@@ -12140,7 +12140,7 @@
                     <a:lstStyle/>
                     <a:p>
                       <a:r>
-                        <a:rPr sz="1100">
+                        <a:rPr sz="1100" b="0">
                           <a:solidFill>
                             <a:srgbClr val="1F2937"/>
                           </a:solidFill>
@@ -12162,7 +12162,7 @@
                     <a:lstStyle/>
                     <a:p>
                       <a:r>
-                        <a:rPr sz="1100">
+                        <a:rPr sz="1100" b="0">
                           <a:solidFill>
                             <a:srgbClr val="1F2937"/>
                           </a:solidFill>
@@ -12184,7 +12184,7 @@
                     <a:lstStyle/>
                     <a:p>
                       <a:r>
-                        <a:rPr sz="1100">
+                        <a:rPr sz="1100" b="0">
                           <a:solidFill>
                             <a:srgbClr val="1F2937"/>
                           </a:solidFill>
@@ -12208,7 +12208,7 @@
                     <a:lstStyle/>
                     <a:p>
                       <a:r>
-                        <a:rPr sz="1100">
+                        <a:rPr sz="1100" b="0">
                           <a:solidFill>
                             <a:srgbClr val="1F2937"/>
                           </a:solidFill>
@@ -12230,7 +12230,7 @@
                     <a:lstStyle/>
                     <a:p>
                       <a:r>
-                        <a:rPr sz="1100">
+                        <a:rPr sz="1100" b="0">
                           <a:solidFill>
                             <a:srgbClr val="1F2937"/>
                           </a:solidFill>
@@ -12252,7 +12252,7 @@
                     <a:lstStyle/>
                     <a:p>
                       <a:r>
-                        <a:rPr sz="1100">
+                        <a:rPr sz="1100" b="0">
                           <a:solidFill>
                             <a:srgbClr val="1F2937"/>
                           </a:solidFill>
@@ -12276,7 +12276,7 @@
                     <a:lstStyle/>
                     <a:p>
                       <a:r>
-                        <a:rPr sz="1100">
+                        <a:rPr sz="1100" b="0">
                           <a:solidFill>
                             <a:srgbClr val="1F2937"/>
                           </a:solidFill>
@@ -12298,7 +12298,7 @@
                     <a:lstStyle/>
                     <a:p>
                       <a:r>
-                        <a:rPr sz="1100">
+                        <a:rPr sz="1100" b="0">
                           <a:solidFill>
                             <a:srgbClr val="1F2937"/>
                           </a:solidFill>
@@ -12320,7 +12320,7 @@
                     <a:lstStyle/>
                     <a:p>
                       <a:r>
-                        <a:rPr sz="1100">
+                        <a:rPr sz="1100" b="0">
                           <a:solidFill>
                             <a:srgbClr val="1F2937"/>
                           </a:solidFill>
@@ -12344,7 +12344,7 @@
                     <a:lstStyle/>
                     <a:p>
                       <a:r>
-                        <a:rPr sz="1100">
+                        <a:rPr sz="1100" b="0">
                           <a:solidFill>
                             <a:srgbClr val="1F2937"/>
                           </a:solidFill>
@@ -12366,7 +12366,7 @@
                     <a:lstStyle/>
                     <a:p>
                       <a:r>
-                        <a:rPr sz="1100">
+                        <a:rPr sz="1100" b="0">
                           <a:solidFill>
                             <a:srgbClr val="1F2937"/>
                           </a:solidFill>
@@ -12388,7 +12388,7 @@
                     <a:lstStyle/>
                     <a:p>
                       <a:r>
-                        <a:rPr sz="1100">
+                        <a:rPr sz="1100" b="0">
                           <a:solidFill>
                             <a:srgbClr val="1F2937"/>
                           </a:solidFill>
@@ -12418,7 +12418,7 @@
         <p:spPr>
           <a:xfrm>
             <a:off x="799200" y="3780000"/>
-            <a:ext cx="10593719" cy="432000"/>
+            <a:ext cx="10593719" cy="503999"/>
           </a:xfrm>
           <a:prstGeom prst="rect">
             <a:avLst/>
@@ -12685,7 +12685,7 @@
         <p:spPr>
           <a:xfrm>
             <a:off x="2379600" y="1105200"/>
-            <a:ext cx="5040000" cy="503999"/>
+            <a:ext cx="5040000" cy="612000"/>
           </a:xfrm>
           <a:prstGeom prst="rect">
             <a:avLst/>
@@ -12763,7 +12763,7 @@
         <p:spPr>
           <a:xfrm>
             <a:off x="799200" y="2736000"/>
-            <a:ext cx="8640000" cy="1620000"/>
+            <a:ext cx="8640000" cy="829798"/>
           </a:xfrm>
           <a:prstGeom prst="rect">
             <a:avLst/>
@@ -15264,7 +15264,7 @@
         <p:spPr>
           <a:xfrm>
             <a:off x="997200" y="1584000"/>
-            <a:ext cx="4789259" cy="3528000"/>
+            <a:ext cx="4789259" cy="3582000"/>
           </a:xfrm>
           <a:prstGeom prst="rect">
             <a:avLst/>
@@ -15702,7 +15702,7 @@
         <p:spPr>
           <a:xfrm>
             <a:off x="6405659" y="1584000"/>
-            <a:ext cx="4789259" cy="3528000"/>
+            <a:ext cx="4789259" cy="3582000"/>
           </a:xfrm>
           <a:prstGeom prst="rect">
             <a:avLst/>
@@ -16402,7 +16402,7 @@
         <p:spPr>
           <a:xfrm>
             <a:off x="1047600" y="2163600"/>
-            <a:ext cx="2361600" cy="388800"/>
+            <a:ext cx="2361600" cy="496800"/>
           </a:xfrm>
           <a:prstGeom prst="rect">
             <a:avLst/>
@@ -16441,7 +16441,7 @@
         <p:spPr>
           <a:xfrm>
             <a:off x="1047600" y="2628000"/>
-            <a:ext cx="2361600" cy="190800"/>
+            <a:ext cx="2361600" cy="280800"/>
           </a:xfrm>
           <a:prstGeom prst="rect">
             <a:avLst/>
@@ -18603,7 +18603,7 @@
                     <a:lstStyle/>
                     <a:p>
                       <a:r>
-                        <a:rPr sz="1050">
+                        <a:rPr sz="1050" b="0">
                           <a:solidFill>
                             <a:srgbClr val="1F2937"/>
                           </a:solidFill>
@@ -18625,7 +18625,7 @@
                     <a:lstStyle/>
                     <a:p>
                       <a:r>
-                        <a:rPr sz="1050">
+                        <a:rPr sz="1050" b="0">
                           <a:solidFill>
                             <a:srgbClr val="1F2937"/>
                           </a:solidFill>
@@ -18647,7 +18647,7 @@
                     <a:lstStyle/>
                     <a:p>
                       <a:r>
-                        <a:rPr sz="1050">
+                        <a:rPr sz="1050" b="0">
                           <a:solidFill>
                             <a:srgbClr val="1F2937"/>
                           </a:solidFill>
@@ -18669,7 +18669,7 @@
                     <a:lstStyle/>
                     <a:p>
                       <a:r>
-                        <a:rPr sz="1050">
+                        <a:rPr sz="1050" b="0">
                           <a:solidFill>
                             <a:srgbClr val="1F2937"/>
                           </a:solidFill>
@@ -18691,7 +18691,7 @@
                     <a:lstStyle/>
                     <a:p>
                       <a:r>
-                        <a:rPr sz="1050">
+                        <a:rPr sz="1050" b="0">
                           <a:solidFill>
                             <a:srgbClr val="1F2937"/>
                           </a:solidFill>
@@ -18713,7 +18713,7 @@
                     <a:lstStyle/>
                     <a:p>
                       <a:r>
-                        <a:rPr sz="1050">
+                        <a:rPr sz="1050" b="0">
                           <a:solidFill>
                             <a:srgbClr val="1F2937"/>
                           </a:solidFill>
@@ -18737,7 +18737,7 @@
                     <a:lstStyle/>
                     <a:p>
                       <a:r>
-                        <a:rPr sz="1050">
+                        <a:rPr sz="1050" b="0">
                           <a:solidFill>
                             <a:srgbClr val="1F2937"/>
                           </a:solidFill>
@@ -18759,7 +18759,7 @@
                     <a:lstStyle/>
                     <a:p>
                       <a:r>
-                        <a:rPr sz="1050">
+                        <a:rPr sz="1050" b="0">
                           <a:solidFill>
                             <a:srgbClr val="1F2937"/>
                           </a:solidFill>
@@ -18781,7 +18781,7 @@
                     <a:lstStyle/>
                     <a:p>
                       <a:r>
-                        <a:rPr sz="1050">
+                        <a:rPr sz="1050" b="0">
                           <a:solidFill>
                             <a:srgbClr val="1F2937"/>
                           </a:solidFill>
@@ -18803,7 +18803,7 @@
                     <a:lstStyle/>
                     <a:p>
                       <a:r>
-                        <a:rPr sz="1050">
+                        <a:rPr sz="1050" b="0">
                           <a:solidFill>
                             <a:srgbClr val="1F2937"/>
                           </a:solidFill>
@@ -18825,7 +18825,7 @@
                     <a:lstStyle/>
                     <a:p>
                       <a:r>
-                        <a:rPr sz="1050">
+                        <a:rPr sz="1050" b="0">
                           <a:solidFill>
                             <a:srgbClr val="1F2937"/>
                           </a:solidFill>
@@ -18847,7 +18847,7 @@
                     <a:lstStyle/>
                     <a:p>
                       <a:r>
-                        <a:rPr sz="1050">
+                        <a:rPr sz="1050" b="0">
                           <a:solidFill>
                             <a:srgbClr val="1F2937"/>
                           </a:solidFill>
@@ -18871,7 +18871,7 @@
                     <a:lstStyle/>
                     <a:p>
                       <a:r>
-                        <a:rPr sz="1050">
+                        <a:rPr sz="1050" b="0">
                           <a:solidFill>
                             <a:srgbClr val="1F2937"/>
                           </a:solidFill>
@@ -18893,7 +18893,7 @@
                     <a:lstStyle/>
                     <a:p>
                       <a:r>
-                        <a:rPr sz="1050">
+                        <a:rPr sz="1050" b="0">
                           <a:solidFill>
                             <a:srgbClr val="1F2937"/>
                           </a:solidFill>
@@ -18915,7 +18915,7 @@
                     <a:lstStyle/>
                     <a:p>
                       <a:r>
-                        <a:rPr sz="1050">
+                        <a:rPr sz="1050" b="0">
                           <a:solidFill>
                             <a:srgbClr val="1F2937"/>
                           </a:solidFill>
@@ -18937,7 +18937,7 @@
                     <a:lstStyle/>
                     <a:p>
                       <a:r>
-                        <a:rPr sz="1050">
+                        <a:rPr sz="1050" b="0">
                           <a:solidFill>
                             <a:srgbClr val="1F2937"/>
                           </a:solidFill>
@@ -18959,7 +18959,7 @@
                     <a:lstStyle/>
                     <a:p>
                       <a:r>
-                        <a:rPr sz="1050">
+                        <a:rPr sz="1050" b="0">
                           <a:solidFill>
                             <a:srgbClr val="1F2937"/>
                           </a:solidFill>
@@ -18981,7 +18981,7 @@
                     <a:lstStyle/>
                     <a:p>
                       <a:r>
-                        <a:rPr sz="1050">
+                        <a:rPr sz="1050" b="0">
                           <a:solidFill>
                             <a:srgbClr val="1F2937"/>
                           </a:solidFill>
@@ -19005,7 +19005,7 @@
                     <a:lstStyle/>
                     <a:p>
                       <a:r>
-                        <a:rPr sz="1050">
+                        <a:rPr sz="1050" b="0">
                           <a:solidFill>
                             <a:srgbClr val="1F2937"/>
                           </a:solidFill>
@@ -19027,7 +19027,7 @@
                     <a:lstStyle/>
                     <a:p>
                       <a:r>
-                        <a:rPr sz="1050">
+                        <a:rPr sz="1050" b="0">
                           <a:solidFill>
                             <a:srgbClr val="1F2937"/>
                           </a:solidFill>
@@ -19049,7 +19049,7 @@
                     <a:lstStyle/>
                     <a:p>
                       <a:r>
-                        <a:rPr sz="1050">
+                        <a:rPr sz="1050" b="0">
                           <a:solidFill>
                             <a:srgbClr val="1F2937"/>
                           </a:solidFill>
@@ -19071,7 +19071,7 @@
                     <a:lstStyle/>
                     <a:p>
                       <a:r>
-                        <a:rPr sz="1050">
+                        <a:rPr sz="1050" b="0">
                           <a:solidFill>
                             <a:srgbClr val="1F2937"/>
                           </a:solidFill>
@@ -19093,7 +19093,7 @@
                     <a:lstStyle/>
                     <a:p>
                       <a:r>
-                        <a:rPr sz="1050">
+                        <a:rPr sz="1050" b="0">
                           <a:solidFill>
                             <a:srgbClr val="1F2937"/>
                           </a:solidFill>
@@ -19115,7 +19115,7 @@
                     <a:lstStyle/>
                     <a:p>
                       <a:r>
-                        <a:rPr sz="1050">
+                        <a:rPr sz="1050" b="0">
                           <a:solidFill>
                             <a:srgbClr val="1F2937"/>
                           </a:solidFill>
@@ -19139,7 +19139,7 @@
                     <a:lstStyle/>
                     <a:p>
                       <a:r>
-                        <a:rPr sz="1050">
+                        <a:rPr sz="1050" b="0">
                           <a:solidFill>
                             <a:srgbClr val="1F2937"/>
                           </a:solidFill>
@@ -19161,7 +19161,7 @@
                     <a:lstStyle/>
                     <a:p>
                       <a:r>
-                        <a:rPr sz="1050">
+                        <a:rPr sz="1050" b="0">
                           <a:solidFill>
                             <a:srgbClr val="1F2937"/>
                           </a:solidFill>
@@ -19183,7 +19183,7 @@
                     <a:lstStyle/>
                     <a:p>
                       <a:r>
-                        <a:rPr sz="1050">
+                        <a:rPr sz="1050" b="0">
                           <a:solidFill>
                             <a:srgbClr val="1F2937"/>
                           </a:solidFill>
@@ -19205,7 +19205,7 @@
                     <a:lstStyle/>
                     <a:p>
                       <a:r>
-                        <a:rPr sz="1050">
+                        <a:rPr sz="1050" b="0">
                           <a:solidFill>
                             <a:srgbClr val="1F2937"/>
                           </a:solidFill>
@@ -19227,7 +19227,7 @@
                     <a:lstStyle/>
                     <a:p>
                       <a:r>
-                        <a:rPr sz="1050">
+                        <a:rPr sz="1050" b="0">
                           <a:solidFill>
                             <a:srgbClr val="1F2937"/>
                           </a:solidFill>
@@ -19249,7 +19249,7 @@
                     <a:lstStyle/>
                     <a:p>
                       <a:r>
-                        <a:rPr sz="1050">
+                        <a:rPr sz="1050" b="0">
                           <a:solidFill>
                             <a:srgbClr val="1F2937"/>
                           </a:solidFill>
@@ -19273,7 +19273,7 @@
                     <a:lstStyle/>
                     <a:p>
                       <a:r>
-                        <a:rPr sz="1050">
+                        <a:rPr sz="1050" b="0">
                           <a:solidFill>
                             <a:srgbClr val="1F2937"/>
                           </a:solidFill>
@@ -19295,7 +19295,7 @@
                     <a:lstStyle/>
                     <a:p>
                       <a:r>
-                        <a:rPr sz="1050">
+                        <a:rPr sz="1050" b="0">
                           <a:solidFill>
                             <a:srgbClr val="1F2937"/>
                           </a:solidFill>
@@ -19317,7 +19317,7 @@
                     <a:lstStyle/>
                     <a:p>
                       <a:r>
-                        <a:rPr sz="1050">
+                        <a:rPr sz="1050" b="0">
                           <a:solidFill>
                             <a:srgbClr val="1F2937"/>
                           </a:solidFill>
@@ -19339,7 +19339,7 @@
                     <a:lstStyle/>
                     <a:p>
                       <a:r>
-                        <a:rPr sz="1050">
+                        <a:rPr sz="1050" b="0">
                           <a:solidFill>
                             <a:srgbClr val="1F2937"/>
                           </a:solidFill>
@@ -19361,7 +19361,7 @@
                     <a:lstStyle/>
                     <a:p>
                       <a:r>
-                        <a:rPr sz="1050">
+                        <a:rPr sz="1050" b="0">
                           <a:solidFill>
                             <a:srgbClr val="1F2937"/>
                           </a:solidFill>
@@ -19383,7 +19383,7 @@
                     <a:lstStyle/>
                     <a:p>
                       <a:r>
-                        <a:rPr sz="1050">
+                        <a:rPr sz="1050" b="0">
                           <a:solidFill>
                             <a:srgbClr val="1F2937"/>
                           </a:solidFill>
@@ -19413,7 +19413,7 @@
         <p:spPr>
           <a:xfrm>
             <a:off x="799200" y="4193999"/>
-            <a:ext cx="10593719" cy="432000"/>
+            <a:ext cx="10593719" cy="503999"/>
           </a:xfrm>
           <a:prstGeom prst="rect">
             <a:avLst/>
@@ -20009,22 +20009,22 @@
         <p:spPr>
           <a:xfrm>
             <a:off x="2023200" y="1493999"/>
-            <a:ext cx="9153719" cy="341999"/>
-          </a:xfrm>
-          <a:prstGeom prst="rect">
-            <a:avLst/>
-          </a:prstGeom>
-          <a:noFill/>
-        </p:spPr>
-        <p:txBody>
-          <a:bodyPr wrap="square" anchor="t" lIns="0" rIns="0" tIns="0" bIns="0">
-            <a:spAutoFit/>
-          </a:bodyPr>
-          <a:lstStyle/>
-          <a:p>
-            <a:pPr algn="l">
-              <a:lnSpc>
-                <a:spcPct val="135000"/>
+            <a:ext cx="9153719" cy="342000"/>
+          </a:xfrm>
+          <a:prstGeom prst="rect">
+            <a:avLst/>
+          </a:prstGeom>
+          <a:noFill/>
+        </p:spPr>
+        <p:txBody>
+          <a:bodyPr wrap="square" anchor="t" lIns="0" rIns="0" tIns="0" bIns="0">
+            <a:spAutoFit/>
+          </a:bodyPr>
+          <a:lstStyle/>
+          <a:p>
+            <a:pPr algn="l">
+              <a:lnSpc>
+                <a:spcPct val="130000"/>
               </a:lnSpc>
             </a:pPr>
             <a:r>
@@ -20275,7 +20275,7 @@
           <a:p>
             <a:pPr algn="l">
               <a:lnSpc>
-                <a:spcPct val="135000"/>
+                <a:spcPct val="130000"/>
               </a:lnSpc>
             </a:pPr>
             <a:r>
@@ -20511,22 +20511,22 @@
         <p:spPr>
           <a:xfrm>
             <a:off x="2023200" y="3272399"/>
-            <a:ext cx="9153719" cy="341999"/>
-          </a:xfrm>
-          <a:prstGeom prst="rect">
-            <a:avLst/>
-          </a:prstGeom>
-          <a:noFill/>
-        </p:spPr>
-        <p:txBody>
-          <a:bodyPr wrap="square" anchor="t" lIns="0" rIns="0" tIns="0" bIns="0">
-            <a:spAutoFit/>
-          </a:bodyPr>
-          <a:lstStyle/>
-          <a:p>
-            <a:pPr algn="l">
-              <a:lnSpc>
-                <a:spcPct val="135000"/>
+            <a:ext cx="9153719" cy="342000"/>
+          </a:xfrm>
+          <a:prstGeom prst="rect">
+            <a:avLst/>
+          </a:prstGeom>
+          <a:noFill/>
+        </p:spPr>
+        <p:txBody>
+          <a:bodyPr wrap="square" anchor="t" lIns="0" rIns="0" tIns="0" bIns="0">
+            <a:spAutoFit/>
+          </a:bodyPr>
+          <a:lstStyle/>
+          <a:p>
+            <a:pPr algn="l">
+              <a:lnSpc>
+                <a:spcPct val="130000"/>
               </a:lnSpc>
             </a:pPr>
             <a:r>
@@ -20778,7 +20778,7 @@
         <p:spPr>
           <a:xfrm>
             <a:off x="2379600" y="1105200"/>
-            <a:ext cx="5040000" cy="503999"/>
+            <a:ext cx="5040000" cy="612000"/>
           </a:xfrm>
           <a:prstGeom prst="rect">
             <a:avLst/>
@@ -20856,7 +20856,7 @@
         <p:spPr>
           <a:xfrm>
             <a:off x="799200" y="2736000"/>
-            <a:ext cx="8640000" cy="1620000"/>
+            <a:ext cx="8640000" cy="829798"/>
           </a:xfrm>
           <a:prstGeom prst="rect">
             <a:avLst/>
@@ -23052,7 +23052,7 @@
                     <a:lstStyle/>
                     <a:p>
                       <a:r>
-                        <a:rPr sz="1100">
+                        <a:rPr sz="1100" b="0">
                           <a:solidFill>
                             <a:srgbClr val="1F2937"/>
                           </a:solidFill>
@@ -23074,7 +23074,7 @@
                     <a:lstStyle/>
                     <a:p>
                       <a:r>
-                        <a:rPr sz="1100">
+                        <a:rPr sz="1100" b="0">
                           <a:solidFill>
                             <a:srgbClr val="1F2937"/>
                           </a:solidFill>
@@ -23096,7 +23096,7 @@
                     <a:lstStyle/>
                     <a:p>
                       <a:r>
-                        <a:rPr sz="1100">
+                        <a:rPr sz="1100" b="0">
                           <a:solidFill>
                             <a:srgbClr val="1F2937"/>
                           </a:solidFill>
@@ -23120,7 +23120,7 @@
                     <a:lstStyle/>
                     <a:p>
                       <a:r>
-                        <a:rPr sz="1100">
+                        <a:rPr sz="1100" b="0">
                           <a:solidFill>
                             <a:srgbClr val="1F2937"/>
                           </a:solidFill>
@@ -23142,7 +23142,7 @@
                     <a:lstStyle/>
                     <a:p>
                       <a:r>
-                        <a:rPr sz="1100">
+                        <a:rPr sz="1100" b="0">
                           <a:solidFill>
                             <a:srgbClr val="1F2937"/>
                           </a:solidFill>
@@ -23164,7 +23164,7 @@
                     <a:lstStyle/>
                     <a:p>
                       <a:r>
-                        <a:rPr sz="1100">
+                        <a:rPr sz="1100" b="0">
                           <a:solidFill>
                             <a:srgbClr val="1F2937"/>
                           </a:solidFill>
@@ -23188,7 +23188,7 @@
                     <a:lstStyle/>
                     <a:p>
                       <a:r>
-                        <a:rPr sz="1100">
+                        <a:rPr sz="1100" b="0">
                           <a:solidFill>
                             <a:srgbClr val="1F2937"/>
                           </a:solidFill>
@@ -23210,7 +23210,7 @@
                     <a:lstStyle/>
                     <a:p>
                       <a:r>
-                        <a:rPr sz="1100">
+                        <a:rPr sz="1100" b="0">
                           <a:solidFill>
                             <a:srgbClr val="1F2937"/>
                           </a:solidFill>
@@ -23232,7 +23232,7 @@
                     <a:lstStyle/>
                     <a:p>
                       <a:r>
-                        <a:rPr sz="1100">
+                        <a:rPr sz="1100" b="0">
                           <a:solidFill>
                             <a:srgbClr val="1F2937"/>
                           </a:solidFill>
@@ -23256,7 +23256,7 @@
                     <a:lstStyle/>
                     <a:p>
                       <a:r>
-                        <a:rPr sz="1100">
+                        <a:rPr sz="1100" b="0">
                           <a:solidFill>
                             <a:srgbClr val="1F2937"/>
                           </a:solidFill>
@@ -23278,7 +23278,7 @@
                     <a:lstStyle/>
                     <a:p>
                       <a:r>
-                        <a:rPr sz="1100">
+                        <a:rPr sz="1100" b="0">
                           <a:solidFill>
                             <a:srgbClr val="1F2937"/>
                           </a:solidFill>
@@ -23300,7 +23300,7 @@
                     <a:lstStyle/>
                     <a:p>
                       <a:r>
-                        <a:rPr sz="1100">
+                        <a:rPr sz="1100" b="0">
                           <a:solidFill>
                             <a:srgbClr val="1F2937"/>
                           </a:solidFill>
@@ -23324,7 +23324,7 @@
                     <a:lstStyle/>
                     <a:p>
                       <a:r>
-                        <a:rPr sz="1100">
+                        <a:rPr sz="1100" b="0">
                           <a:solidFill>
                             <a:srgbClr val="1F2937"/>
                           </a:solidFill>
@@ -23346,7 +23346,7 @@
                     <a:lstStyle/>
                     <a:p>
                       <a:r>
-                        <a:rPr sz="1100">
+                        <a:rPr sz="1100" b="0">
                           <a:solidFill>
                             <a:srgbClr val="1F2937"/>
                           </a:solidFill>
@@ -23368,7 +23368,7 @@
                     <a:lstStyle/>
                     <a:p>
                       <a:r>
-                        <a:rPr sz="1100">
+                        <a:rPr sz="1100" b="0">
                           <a:solidFill>
                             <a:srgbClr val="1F2937"/>
                           </a:solidFill>
@@ -23398,7 +23398,7 @@
         <p:spPr>
           <a:xfrm>
             <a:off x="799200" y="3780000"/>
-            <a:ext cx="10593719" cy="432000"/>
+            <a:ext cx="10593719" cy="503999"/>
           </a:xfrm>
           <a:prstGeom prst="rect">
             <a:avLst/>
@@ -23911,22 +23911,22 @@
         <p:spPr>
           <a:xfrm>
             <a:off x="2005200" y="1296000"/>
-            <a:ext cx="3793859" cy="540000"/>
-          </a:xfrm>
-          <a:prstGeom prst="rect">
-            <a:avLst/>
-          </a:prstGeom>
-          <a:noFill/>
-        </p:spPr>
-        <p:txBody>
-          <a:bodyPr wrap="square" anchor="t" lIns="0" rIns="0" tIns="0" bIns="0">
-            <a:spAutoFit/>
-          </a:bodyPr>
-          <a:lstStyle/>
-          <a:p>
-            <a:pPr algn="l">
-              <a:lnSpc>
-                <a:spcPct val="130000"/>
+            <a:ext cx="3793859" cy="595679"/>
+          </a:xfrm>
+          <a:prstGeom prst="rect">
+            <a:avLst/>
+          </a:prstGeom>
+          <a:noFill/>
+        </p:spPr>
+        <p:txBody>
+          <a:bodyPr wrap="square" anchor="t" lIns="0" rIns="0" tIns="0" bIns="0">
+            <a:spAutoFit/>
+          </a:bodyPr>
+          <a:lstStyle/>
+          <a:p>
+            <a:pPr algn="l">
+              <a:lnSpc>
+                <a:spcPct val="128000"/>
               </a:lnSpc>
             </a:pPr>
             <a:r>
@@ -23950,22 +23950,22 @@
         <p:spPr>
           <a:xfrm>
             <a:off x="997200" y="1908000"/>
-            <a:ext cx="4801859" cy="1629000"/>
-          </a:xfrm>
-          <a:prstGeom prst="rect">
-            <a:avLst/>
-          </a:prstGeom>
-          <a:noFill/>
-        </p:spPr>
-        <p:txBody>
-          <a:bodyPr wrap="square" anchor="t" lIns="0" rIns="0" tIns="0" bIns="0">
-            <a:spAutoFit/>
-          </a:bodyPr>
-          <a:lstStyle/>
-          <a:p>
-            <a:pPr algn="l">
-              <a:lnSpc>
-                <a:spcPct val="140000"/>
+            <a:ext cx="4801859" cy="1647000"/>
+          </a:xfrm>
+          <a:prstGeom prst="rect">
+            <a:avLst/>
+          </a:prstGeom>
+          <a:noFill/>
+        </p:spPr>
+        <p:txBody>
+          <a:bodyPr wrap="square" anchor="t" lIns="0" rIns="0" tIns="0" bIns="0">
+            <a:spAutoFit/>
+          </a:bodyPr>
+          <a:lstStyle/>
+          <a:p>
+            <a:pPr algn="l">
+              <a:lnSpc>
+                <a:spcPct val="134000"/>
               </a:lnSpc>
               <a:spcAft>
                 <a:spcPts val="300"/>
@@ -23984,7 +23984,7 @@
           <a:p>
             <a:pPr algn="l">
               <a:lnSpc>
-                <a:spcPct val="140000"/>
+                <a:spcPct val="134000"/>
               </a:lnSpc>
               <a:spcAft>
                 <a:spcPts val="300"/>
@@ -24003,7 +24003,7 @@
           <a:p>
             <a:pPr algn="l">
               <a:lnSpc>
-                <a:spcPct val="140000"/>
+                <a:spcPct val="134000"/>
               </a:lnSpc>
               <a:spcAft>
                 <a:spcPts val="300"/>
@@ -24022,7 +24022,7 @@
           <a:p>
             <a:pPr algn="l">
               <a:lnSpc>
-                <a:spcPct val="140000"/>
+                <a:spcPct val="134000"/>
               </a:lnSpc>
               <a:spcAft>
                 <a:spcPts val="300"/>
@@ -24178,22 +24178,22 @@
         <p:spPr>
           <a:xfrm>
             <a:off x="7401059" y="1296000"/>
-            <a:ext cx="3793859" cy="540000"/>
-          </a:xfrm>
-          <a:prstGeom prst="rect">
-            <a:avLst/>
-          </a:prstGeom>
-          <a:noFill/>
-        </p:spPr>
-        <p:txBody>
-          <a:bodyPr wrap="square" anchor="t" lIns="0" rIns="0" tIns="0" bIns="0">
-            <a:spAutoFit/>
-          </a:bodyPr>
-          <a:lstStyle/>
-          <a:p>
-            <a:pPr algn="l">
-              <a:lnSpc>
-                <a:spcPct val="130000"/>
+            <a:ext cx="3793859" cy="595679"/>
+          </a:xfrm>
+          <a:prstGeom prst="rect">
+            <a:avLst/>
+          </a:prstGeom>
+          <a:noFill/>
+        </p:spPr>
+        <p:txBody>
+          <a:bodyPr wrap="square" anchor="t" lIns="0" rIns="0" tIns="0" bIns="0">
+            <a:spAutoFit/>
+          </a:bodyPr>
+          <a:lstStyle/>
+          <a:p>
+            <a:pPr algn="l">
+              <a:lnSpc>
+                <a:spcPct val="128000"/>
               </a:lnSpc>
             </a:pPr>
             <a:r>
@@ -24217,22 +24217,22 @@
         <p:spPr>
           <a:xfrm>
             <a:off x="6393059" y="1908000"/>
-            <a:ext cx="4801859" cy="1629000"/>
-          </a:xfrm>
-          <a:prstGeom prst="rect">
-            <a:avLst/>
-          </a:prstGeom>
-          <a:noFill/>
-        </p:spPr>
-        <p:txBody>
-          <a:bodyPr wrap="square" anchor="t" lIns="0" rIns="0" tIns="0" bIns="0">
-            <a:spAutoFit/>
-          </a:bodyPr>
-          <a:lstStyle/>
-          <a:p>
-            <a:pPr algn="l">
-              <a:lnSpc>
-                <a:spcPct val="140000"/>
+            <a:ext cx="4801859" cy="1647000"/>
+          </a:xfrm>
+          <a:prstGeom prst="rect">
+            <a:avLst/>
+          </a:prstGeom>
+          <a:noFill/>
+        </p:spPr>
+        <p:txBody>
+          <a:bodyPr wrap="square" anchor="t" lIns="0" rIns="0" tIns="0" bIns="0">
+            <a:spAutoFit/>
+          </a:bodyPr>
+          <a:lstStyle/>
+          <a:p>
+            <a:pPr algn="l">
+              <a:lnSpc>
+                <a:spcPct val="134000"/>
               </a:lnSpc>
               <a:spcAft>
                 <a:spcPts val="300"/>
@@ -24251,7 +24251,7 @@
           <a:p>
             <a:pPr algn="l">
               <a:lnSpc>
-                <a:spcPct val="140000"/>
+                <a:spcPct val="134000"/>
               </a:lnSpc>
               <a:spcAft>
                 <a:spcPts val="300"/>
@@ -24270,7 +24270,7 @@
           <a:p>
             <a:pPr algn="l">
               <a:lnSpc>
-                <a:spcPct val="140000"/>
+                <a:spcPct val="134000"/>
               </a:lnSpc>
               <a:spcAft>
                 <a:spcPts val="300"/>
@@ -24289,7 +24289,7 @@
           <a:p>
             <a:pPr algn="l">
               <a:lnSpc>
-                <a:spcPct val="140000"/>
+                <a:spcPct val="134000"/>
               </a:lnSpc>
               <a:spcAft>
                 <a:spcPts val="300"/>
@@ -24445,22 +24445,22 @@
         <p:spPr>
           <a:xfrm>
             <a:off x="2005200" y="3986999"/>
-            <a:ext cx="3793859" cy="540000"/>
-          </a:xfrm>
-          <a:prstGeom prst="rect">
-            <a:avLst/>
-          </a:prstGeom>
-          <a:noFill/>
-        </p:spPr>
-        <p:txBody>
-          <a:bodyPr wrap="square" anchor="t" lIns="0" rIns="0" tIns="0" bIns="0">
-            <a:spAutoFit/>
-          </a:bodyPr>
-          <a:lstStyle/>
-          <a:p>
-            <a:pPr algn="l">
-              <a:lnSpc>
-                <a:spcPct val="130000"/>
+            <a:ext cx="3793859" cy="351839"/>
+          </a:xfrm>
+          <a:prstGeom prst="rect">
+            <a:avLst/>
+          </a:prstGeom>
+          <a:noFill/>
+        </p:spPr>
+        <p:txBody>
+          <a:bodyPr wrap="square" anchor="t" lIns="0" rIns="0" tIns="0" bIns="0">
+            <a:spAutoFit/>
+          </a:bodyPr>
+          <a:lstStyle/>
+          <a:p>
+            <a:pPr algn="l">
+              <a:lnSpc>
+                <a:spcPct val="128000"/>
               </a:lnSpc>
             </a:pPr>
             <a:r>
@@ -24484,22 +24484,22 @@
         <p:spPr>
           <a:xfrm>
             <a:off x="997200" y="4599000"/>
-            <a:ext cx="4801859" cy="1629000"/>
-          </a:xfrm>
-          <a:prstGeom prst="rect">
-            <a:avLst/>
-          </a:prstGeom>
-          <a:noFill/>
-        </p:spPr>
-        <p:txBody>
-          <a:bodyPr wrap="square" anchor="t" lIns="0" rIns="0" tIns="0" bIns="0">
-            <a:spAutoFit/>
-          </a:bodyPr>
-          <a:lstStyle/>
-          <a:p>
-            <a:pPr algn="l">
-              <a:lnSpc>
-                <a:spcPct val="140000"/>
+            <a:ext cx="4801859" cy="1646999"/>
+          </a:xfrm>
+          <a:prstGeom prst="rect">
+            <a:avLst/>
+          </a:prstGeom>
+          <a:noFill/>
+        </p:spPr>
+        <p:txBody>
+          <a:bodyPr wrap="square" anchor="t" lIns="0" rIns="0" tIns="0" bIns="0">
+            <a:spAutoFit/>
+          </a:bodyPr>
+          <a:lstStyle/>
+          <a:p>
+            <a:pPr algn="l">
+              <a:lnSpc>
+                <a:spcPct val="134000"/>
               </a:lnSpc>
               <a:spcAft>
                 <a:spcPts val="300"/>
@@ -24518,7 +24518,7 @@
           <a:p>
             <a:pPr algn="l">
               <a:lnSpc>
-                <a:spcPct val="140000"/>
+                <a:spcPct val="134000"/>
               </a:lnSpc>
               <a:spcAft>
                 <a:spcPts val="300"/>
@@ -24537,7 +24537,7 @@
           <a:p>
             <a:pPr algn="l">
               <a:lnSpc>
-                <a:spcPct val="140000"/>
+                <a:spcPct val="134000"/>
               </a:lnSpc>
               <a:spcAft>
                 <a:spcPts val="300"/>
@@ -24556,7 +24556,7 @@
           <a:p>
             <a:pPr algn="l">
               <a:lnSpc>
-                <a:spcPct val="140000"/>
+                <a:spcPct val="134000"/>
               </a:lnSpc>
               <a:spcAft>
                 <a:spcPts val="300"/>
@@ -24712,22 +24712,22 @@
         <p:spPr>
           <a:xfrm>
             <a:off x="7401059" y="3986999"/>
-            <a:ext cx="3793859" cy="540000"/>
-          </a:xfrm>
-          <a:prstGeom prst="rect">
-            <a:avLst/>
-          </a:prstGeom>
-          <a:noFill/>
-        </p:spPr>
-        <p:txBody>
-          <a:bodyPr wrap="square" anchor="t" lIns="0" rIns="0" tIns="0" bIns="0">
-            <a:spAutoFit/>
-          </a:bodyPr>
-          <a:lstStyle/>
-          <a:p>
-            <a:pPr algn="l">
-              <a:lnSpc>
-                <a:spcPct val="130000"/>
+            <a:ext cx="3793859" cy="351839"/>
+          </a:xfrm>
+          <a:prstGeom prst="rect">
+            <a:avLst/>
+          </a:prstGeom>
+          <a:noFill/>
+        </p:spPr>
+        <p:txBody>
+          <a:bodyPr wrap="square" anchor="t" lIns="0" rIns="0" tIns="0" bIns="0">
+            <a:spAutoFit/>
+          </a:bodyPr>
+          <a:lstStyle/>
+          <a:p>
+            <a:pPr algn="l">
+              <a:lnSpc>
+                <a:spcPct val="128000"/>
               </a:lnSpc>
             </a:pPr>
             <a:r>
@@ -24751,22 +24751,22 @@
         <p:spPr>
           <a:xfrm>
             <a:off x="6393059" y="4599000"/>
-            <a:ext cx="4801859" cy="1629000"/>
-          </a:xfrm>
-          <a:prstGeom prst="rect">
-            <a:avLst/>
-          </a:prstGeom>
-          <a:noFill/>
-        </p:spPr>
-        <p:txBody>
-          <a:bodyPr wrap="square" anchor="t" lIns="0" rIns="0" tIns="0" bIns="0">
-            <a:spAutoFit/>
-          </a:bodyPr>
-          <a:lstStyle/>
-          <a:p>
-            <a:pPr algn="l">
-              <a:lnSpc>
-                <a:spcPct val="140000"/>
+            <a:ext cx="4801859" cy="1646999"/>
+          </a:xfrm>
+          <a:prstGeom prst="rect">
+            <a:avLst/>
+          </a:prstGeom>
+          <a:noFill/>
+        </p:spPr>
+        <p:txBody>
+          <a:bodyPr wrap="square" anchor="t" lIns="0" rIns="0" tIns="0" bIns="0">
+            <a:spAutoFit/>
+          </a:bodyPr>
+          <a:lstStyle/>
+          <a:p>
+            <a:pPr algn="l">
+              <a:lnSpc>
+                <a:spcPct val="134000"/>
               </a:lnSpc>
               <a:spcAft>
                 <a:spcPts val="300"/>
@@ -24785,7 +24785,7 @@
           <a:p>
             <a:pPr algn="l">
               <a:lnSpc>
-                <a:spcPct val="140000"/>
+                <a:spcPct val="134000"/>
               </a:lnSpc>
               <a:spcAft>
                 <a:spcPts val="300"/>
@@ -24804,7 +24804,7 @@
           <a:p>
             <a:pPr algn="l">
               <a:lnSpc>
-                <a:spcPct val="140000"/>
+                <a:spcPct val="134000"/>
               </a:lnSpc>
               <a:spcAft>
                 <a:spcPts val="300"/>
@@ -24823,7 +24823,7 @@
           <a:p>
             <a:pPr algn="l">
               <a:lnSpc>
-                <a:spcPct val="140000"/>
+                <a:spcPct val="134000"/>
               </a:lnSpc>
               <a:spcAft>
                 <a:spcPts val="300"/>
@@ -26643,7 +26643,7 @@
           <a:p>
             <a:pPr algn="l">
               <a:lnSpc>
-                <a:spcPct val="135000"/>
+                <a:spcPct val="130000"/>
               </a:lnSpc>
             </a:pPr>
             <a:r>
@@ -26811,7 +26811,7 @@
               </a:lnSpc>
             </a:pPr>
             <a:r>
-              <a:rPr sz="1150" b="1" i="0">
+              <a:rPr sz="1100" b="1" i="0">
                 <a:solidFill>
                   <a:srgbClr val="1E4FA8"/>
                 </a:solidFill>
@@ -26846,7 +26846,7 @@
           <a:p>
             <a:pPr algn="l">
               <a:lnSpc>
-                <a:spcPct val="130000"/>
+                <a:spcPct val="125000"/>
               </a:lnSpc>
             </a:pPr>
             <a:r>
@@ -27137,7 +27137,7 @@
         <p:spPr>
           <a:xfrm>
             <a:off x="2379600" y="1105200"/>
-            <a:ext cx="5040000" cy="503999"/>
+            <a:ext cx="5040000" cy="612000"/>
           </a:xfrm>
           <a:prstGeom prst="rect">
             <a:avLst/>
@@ -27215,7 +27215,7 @@
         <p:spPr>
           <a:xfrm>
             <a:off x="799200" y="2736000"/>
-            <a:ext cx="8640000" cy="1620000"/>
+            <a:ext cx="8640000" cy="829798"/>
           </a:xfrm>
           <a:prstGeom prst="rect">
             <a:avLst/>
@@ -29434,7 +29434,7 @@
                     <a:lstStyle/>
                     <a:p>
                       <a:r>
-                        <a:rPr sz="1100">
+                        <a:rPr sz="1100" b="0">
                           <a:solidFill>
                             <a:srgbClr val="1F2937"/>
                           </a:solidFill>
@@ -29456,7 +29456,7 @@
                     <a:lstStyle/>
                     <a:p>
                       <a:r>
-                        <a:rPr sz="1100">
+                        <a:rPr sz="1100" b="0">
                           <a:solidFill>
                             <a:srgbClr val="1F2937"/>
                           </a:solidFill>
@@ -29478,7 +29478,7 @@
                     <a:lstStyle/>
                     <a:p>
                       <a:r>
-                        <a:rPr sz="1100">
+                        <a:rPr sz="1100" b="0">
                           <a:solidFill>
                             <a:srgbClr val="1F2937"/>
                           </a:solidFill>
@@ -29500,7 +29500,7 @@
                     <a:lstStyle/>
                     <a:p>
                       <a:r>
-                        <a:rPr sz="1100">
+                        <a:rPr sz="1100" b="0">
                           <a:solidFill>
                             <a:srgbClr val="1F2937"/>
                           </a:solidFill>
@@ -29524,7 +29524,7 @@
                     <a:lstStyle/>
                     <a:p>
                       <a:r>
-                        <a:rPr sz="1100">
+                        <a:rPr sz="1100" b="0">
                           <a:solidFill>
                             <a:srgbClr val="1F2937"/>
                           </a:solidFill>
@@ -29546,7 +29546,7 @@
                     <a:lstStyle/>
                     <a:p>
                       <a:r>
-                        <a:rPr sz="1100">
+                        <a:rPr sz="1100" b="0">
                           <a:solidFill>
                             <a:srgbClr val="1F2937"/>
                           </a:solidFill>
@@ -29568,7 +29568,7 @@
                     <a:lstStyle/>
                     <a:p>
                       <a:r>
-                        <a:rPr sz="1100">
+                        <a:rPr sz="1100" b="0">
                           <a:solidFill>
                             <a:srgbClr val="1F2937"/>
                           </a:solidFill>
@@ -29590,7 +29590,7 @@
                     <a:lstStyle/>
                     <a:p>
                       <a:r>
-                        <a:rPr sz="1100">
+                        <a:rPr sz="1100" b="0">
                           <a:solidFill>
                             <a:srgbClr val="1F2937"/>
                           </a:solidFill>
@@ -29614,7 +29614,7 @@
                     <a:lstStyle/>
                     <a:p>
                       <a:r>
-                        <a:rPr sz="1100">
+                        <a:rPr sz="1100" b="0">
                           <a:solidFill>
                             <a:srgbClr val="1F2937"/>
                           </a:solidFill>
@@ -29636,7 +29636,7 @@
                     <a:lstStyle/>
                     <a:p>
                       <a:r>
-                        <a:rPr sz="1100">
+                        <a:rPr sz="1100" b="0">
                           <a:solidFill>
                             <a:srgbClr val="1F2937"/>
                           </a:solidFill>
@@ -29658,7 +29658,7 @@
                     <a:lstStyle/>
                     <a:p>
                       <a:r>
-                        <a:rPr sz="1100">
+                        <a:rPr sz="1100" b="0">
                           <a:solidFill>
                             <a:srgbClr val="1F2937"/>
                           </a:solidFill>
@@ -29680,7 +29680,7 @@
                     <a:lstStyle/>
                     <a:p>
                       <a:r>
-                        <a:rPr sz="1100">
+                        <a:rPr sz="1100" b="0">
                           <a:solidFill>
                             <a:srgbClr val="1F2937"/>
                           </a:solidFill>
@@ -29704,7 +29704,7 @@
                     <a:lstStyle/>
                     <a:p>
                       <a:r>
-                        <a:rPr sz="1100">
+                        <a:rPr sz="1100" b="0">
                           <a:solidFill>
                             <a:srgbClr val="1F2937"/>
                           </a:solidFill>
@@ -29726,7 +29726,7 @@
                     <a:lstStyle/>
                     <a:p>
                       <a:r>
-                        <a:rPr sz="1100">
+                        <a:rPr sz="1100" b="0">
                           <a:solidFill>
                             <a:srgbClr val="1F2937"/>
                           </a:solidFill>
@@ -29748,7 +29748,7 @@
                     <a:lstStyle/>
                     <a:p>
                       <a:r>
-                        <a:rPr sz="1100">
+                        <a:rPr sz="1100" b="0">
                           <a:solidFill>
                             <a:srgbClr val="1F2937"/>
                           </a:solidFill>
@@ -29770,7 +29770,7 @@
                     <a:lstStyle/>
                     <a:p>
                       <a:r>
-                        <a:rPr sz="1100">
+                        <a:rPr sz="1100" b="0">
                           <a:solidFill>
                             <a:srgbClr val="1F2937"/>
                           </a:solidFill>
@@ -29800,7 +29800,7 @@
         <p:spPr>
           <a:xfrm>
             <a:off x="799200" y="3366000"/>
-            <a:ext cx="10593719" cy="432000"/>
+            <a:ext cx="10593719" cy="503999"/>
           </a:xfrm>
           <a:prstGeom prst="rect">
             <a:avLst/>
@@ -30311,7 +30311,7 @@
         <p:spPr>
           <a:xfrm>
             <a:off x="997200" y="1584000"/>
-            <a:ext cx="4789259" cy="3528000"/>
+            <a:ext cx="4789259" cy="3582000"/>
           </a:xfrm>
           <a:prstGeom prst="rect">
             <a:avLst/>
@@ -30717,7 +30717,7 @@
         <p:spPr>
           <a:xfrm>
             <a:off x="6405659" y="1584000"/>
-            <a:ext cx="4789259" cy="3528000"/>
+            <a:ext cx="4789259" cy="3582000"/>
           </a:xfrm>
           <a:prstGeom prst="rect">
             <a:avLst/>
@@ -31509,7 +31509,7 @@
         <p:spPr>
           <a:xfrm>
             <a:off x="1015200" y="1890000"/>
-            <a:ext cx="2895240" cy="3240000"/>
+            <a:ext cx="2895240" cy="3276000"/>
           </a:xfrm>
           <a:prstGeom prst="rect">
             <a:avLst/>
@@ -31737,7 +31737,7 @@
         <p:spPr>
           <a:xfrm>
             <a:off x="4648440" y="1890000"/>
-            <a:ext cx="2895240" cy="3240000"/>
+            <a:ext cx="2895240" cy="3276000"/>
           </a:xfrm>
           <a:prstGeom prst="rect">
             <a:avLst/>
@@ -31965,7 +31965,7 @@
         <p:spPr>
           <a:xfrm>
             <a:off x="8281679" y="1890000"/>
-            <a:ext cx="2895240" cy="3240000"/>
+            <a:ext cx="2895240" cy="3276000"/>
           </a:xfrm>
           <a:prstGeom prst="rect">
             <a:avLst/>
@@ -32331,7 +32331,7 @@
         <p:spPr>
           <a:xfrm>
             <a:off x="2379600" y="1105200"/>
-            <a:ext cx="5040000" cy="503999"/>
+            <a:ext cx="5040000" cy="612000"/>
           </a:xfrm>
           <a:prstGeom prst="rect">
             <a:avLst/>
@@ -32409,7 +32409,7 @@
         <p:spPr>
           <a:xfrm>
             <a:off x="799200" y="2736000"/>
-            <a:ext cx="8640000" cy="1620000"/>
+            <a:ext cx="8640000" cy="829798"/>
           </a:xfrm>
           <a:prstGeom prst="rect">
             <a:avLst/>
